--- a/slides/sesion-08.pptx
+++ b/slides/sesion-08.pptx
@@ -3383,7 +3383,7 @@
             <a:r>
               <a:rPr sz="1500" b="0">
                 <a:solidFill>
-                  <a:srgbClr val="8A7C70"/>
+                  <a:srgbClr val="6F645B"/>
                 </a:solidFill>
                 <a:latin typeface="Calibri"/>
               </a:rPr>
@@ -5626,7 +5626,7 @@
             <a:r>
               <a:rPr sz="1050" b="0">
                 <a:solidFill>
-                  <a:srgbClr val="8A7C70"/>
+                  <a:srgbClr val="6F645B"/>
                 </a:solidFill>
                 <a:latin typeface="Calibri"/>
               </a:rPr>
@@ -5833,7 +5833,7 @@
             <a:r>
               <a:rPr sz="1050" b="0">
                 <a:solidFill>
-                  <a:srgbClr val="8A7C70"/>
+                  <a:srgbClr val="6F645B"/>
                 </a:solidFill>
                 <a:latin typeface="Calibri"/>
               </a:rPr>
@@ -6040,7 +6040,7 @@
             <a:r>
               <a:rPr sz="1050" b="0">
                 <a:solidFill>
-                  <a:srgbClr val="8A7C70"/>
+                  <a:srgbClr val="6F645B"/>
                 </a:solidFill>
                 <a:latin typeface="Calibri"/>
               </a:rPr>
